--- a/test/generator/baseline/gen.csv.to.pptx.pptx
+++ b/test/generator/baseline/gen.csv.to.pptx.pptx
@@ -4,6 +4,9 @@
   <p:sldMasterIdLst>
     <p:sldMasterId id="2147483648" r:id="rId1"/>
   </p:sldMasterIdLst>
+  <p:notesMasterIdLst>
+    <p:notesMasterId r:id="rId18"/>
+  </p:notesMasterIdLst>
   <p:sldIdLst>
     <p:sldId id="256" r:id="rId2"/>
     <p:sldId id="257" r:id="rId3"/>
@@ -21,6 +24,187 @@
   <p:sldSz cx="9144000" cy="5143500"/>
   <p:notesSz cx="6858000" cy="9144000"/>
 </p:presentation>
+</file>
+
+<file path=ppt/notesMasters/notesMaster1.xml><?xml version="1.0" encoding="utf-8"?>
+<p:notesMaster xmlns:a="http://schemas.openxmlformats.org/drawingml/2006/main" xmlns:r="http://schemas.openxmlformats.org/officeDocument/2006/relationships" xmlns:p="http://schemas.openxmlformats.org/presentationml/2006/main">
+  <p:cSld>
+    <p:spTree>
+      <p:nvGrpSpPr>
+        <p:cNvPr id="1" name=""/>
+        <p:cNvGrpSpPr/>
+        <p:nvPr/>
+      </p:nvGrpSpPr>
+      <p:grpSpPr>
+        <a:xfrm>
+          <a:off x="0" y="0"/>
+          <a:ext cx="0" cy="0"/>
+          <a:chOff x="0" y="0"/>
+          <a:chExt cx="0" cy="0"/>
+        </a:xfrm>
+      </p:grpSpPr>
+    </p:spTree>
+  </p:cSld>
+  <p:clrMap bg1="lt1" tx1="dk1" bg2="lt2" tx2="dk2" accent1="accent1" accent2="accent2" accent3="accent3" accent4="accent4" accent5="accent5" accent6="accent6" hlink="hlink" folHlink="folHlink"/>
+</p:notesMaster>
+</file>
+
+<file path=ppt/notesSlides/notesSlide12.xml><?xml version="1.0" encoding="utf-8"?>
+<p:notes xmlns:a="http://schemas.openxmlformats.org/drawingml/2006/main" xmlns:r="http://schemas.openxmlformats.org/officeDocument/2006/relationships" xmlns:p="http://schemas.openxmlformats.org/presentationml/2006/main">
+  <p:cSld>
+    <p:spTree>
+      <p:nvGrpSpPr>
+        <p:cNvPr id="1" name=""/>
+        <p:cNvGrpSpPr/>
+        <p:nvPr/>
+      </p:nvGrpSpPr>
+      <p:grpSpPr>
+        <a:xfrm>
+          <a:off x="0" y="0"/>
+          <a:ext cx="0" cy="0"/>
+          <a:chOff x="0" y="0"/>
+          <a:chExt cx="0" cy="0"/>
+        </a:xfrm>
+      </p:grpSpPr>
+      <p:sp>
+        <p:nvSpPr>
+          <p:cNvPr id="2" name="Notes"/>
+          <p:cNvSpPr>
+            <a:spLocks noGrp="1"/>
+          </p:cNvSpPr>
+          <p:nvPr>
+            <p:ph type="body" idx="1"/>
+          </p:nvPr>
+        </p:nvSpPr>
+        <p:spPr/>
+        <p:txBody>
+          <a:bodyPr/>
+          <a:lstStyle/>
+          <a:p>
+            <a:pPr>
+              <a:buNone/>
+            </a:pPr>
+            <a:r>
+              <a:rPr lang="en-US" dirty="0"/>
+              <a:t>Comment: # TestString: Hello from custom props</a:t>
+            </a:r>
+            <a:endParaRPr lang="en-US" dirty="0"/>
+          </a:p>
+          <a:p>
+            <a:pPr>
+              <a:buNone/>
+            </a:pPr>
+            <a:r>
+              <a:rPr lang="en-US" dirty="0"/>
+              <a:t>Comment: # TestNumber: 42</a:t>
+            </a:r>
+            <a:endParaRPr lang="en-US" dirty="0"/>
+          </a:p>
+          <a:p>
+            <a:pPr>
+              <a:buNone/>
+            </a:pPr>
+            <a:r>
+              <a:rPr lang="en-US" dirty="0"/>
+              <a:t>Comment: # TestBool: true</a:t>
+            </a:r>
+            <a:endParaRPr lang="en-US" dirty="0"/>
+          </a:p>
+          <a:p>
+            <a:pPr>
+              <a:buNone/>
+            </a:pPr>
+            <a:r>
+              <a:rPr lang="en-US" dirty="0"/>
+              <a:t>Comment: # Sheet: Sheet1</a:t>
+            </a:r>
+            <a:endParaRPr lang="en-US" dirty="0"/>
+          </a:p>
+          <a:p>
+            <a:pPr>
+              <a:buNone/>
+            </a:pPr>
+            <a:r>
+              <a:rPr lang="en-US" dirty="0"/>
+              <a:t>Comment: # Sheet: Sheet2</a:t>
+            </a:r>
+            <a:endParaRPr lang="en-US" dirty="0"/>
+          </a:p>
+          <a:p>
+            <a:pPr>
+              <a:buNone/>
+            </a:pPr>
+            <a:r>
+              <a:rPr lang="en-US" dirty="0"/>
+              <a:t>Comment: # Sheet: Sheet3</a:t>
+            </a:r>
+            <a:endParaRPr lang="en-US" dirty="0"/>
+          </a:p>
+          <a:p>
+            <a:pPr>
+              <a:buNone/>
+            </a:pPr>
+            <a:r>
+              <a:rPr lang="en-US" dirty="0"/>
+              <a:t>Comment: # Sheet: Sheet4</a:t>
+            </a:r>
+            <a:endParaRPr lang="en-US" dirty="0"/>
+          </a:p>
+          <a:p>
+            <a:pPr>
+              <a:buNone/>
+            </a:pPr>
+            <a:r>
+              <a:rPr lang="en-US" dirty="0"/>
+              <a:t>Comment: # Sheet: Sheet5</a:t>
+            </a:r>
+            <a:endParaRPr lang="en-US" dirty="0"/>
+          </a:p>
+          <a:p>
+            <a:pPr>
+              <a:buNone/>
+            </a:pPr>
+            <a:r>
+              <a:rPr lang="en-US" dirty="0"/>
+              <a:t>Comment: # Sheet: Sheet6</a:t>
+            </a:r>
+            <a:endParaRPr lang="en-US" dirty="0"/>
+          </a:p>
+          <a:p>
+            <a:pPr>
+              <a:buNone/>
+            </a:pPr>
+            <a:r>
+              <a:rPr lang="en-US" dirty="0"/>
+              <a:t>Comment: # Sheet: Sheet7</a:t>
+            </a:r>
+            <a:endParaRPr lang="en-US" dirty="0"/>
+          </a:p>
+          <a:p>
+            <a:pPr>
+              <a:buNone/>
+            </a:pPr>
+            <a:r>
+              <a:rPr lang="en-US" dirty="0"/>
+              <a:t>Comment: # Sheet: Sheet8</a:t>
+            </a:r>
+            <a:endParaRPr lang="en-US" dirty="0"/>
+          </a:p>
+          <a:p>
+            <a:pPr>
+              <a:buNone/>
+            </a:pPr>
+            <a:r>
+              <a:rPr lang="en-US" dirty="0"/>
+              <a:t>Comment: # Sheet: Chart Sheet</a:t>
+            </a:r>
+            <a:endParaRPr lang="en-US" dirty="0"/>
+          </a:p>
+        </p:txBody>
+      </p:sp>
+    </p:spTree>
+  </p:cSld>
+</p:notes>
 </file>
 
 <file path=ppt/slideLayouts/slideLayout1.xml><?xml version="1.0" encoding="utf-8"?>
@@ -50503,4 +50687,121 @@
   <a:objectDefaults/>
   <a:extraClrSchemeLst/>
 </a:theme>
+</file>
+
+<file path=ppt/theme/theme2.xml><?xml version="1.0" encoding="utf-8"?>
+<a:theme xmlns:a="http://schemas.openxmlformats.org/drawingml/2006/main" name="Notes Theme">
+  <a:themeElements>
+    <a:clrScheme name="Office">
+      <a:dk1>
+        <a:sysClr val="windowText" lastClr="000000"/>
+      </a:dk1>
+      <a:lt1>
+        <a:sysClr val="window" lastClr="FFFFFF"/>
+      </a:lt1>
+      <a:dk2>
+        <a:srgbClr val="44546A"/>
+      </a:dk2>
+      <a:lt2>
+        <a:srgbClr val="E7E6E6"/>
+      </a:lt2>
+      <a:accent1>
+        <a:srgbClr val="4472C4"/>
+      </a:accent1>
+      <a:accent2>
+        <a:srgbClr val="ED7D31"/>
+      </a:accent2>
+      <a:accent3>
+        <a:srgbClr val="A5A5A5"/>
+      </a:accent3>
+      <a:accent4>
+        <a:srgbClr val="FFC000"/>
+      </a:accent4>
+      <a:accent5>
+        <a:srgbClr val="5B9BD5"/>
+      </a:accent5>
+      <a:accent6>
+        <a:srgbClr val="70AD47"/>
+      </a:accent6>
+      <a:hlink>
+        <a:srgbClr val="0563C1"/>
+      </a:hlink>
+      <a:folHlink>
+        <a:srgbClr val="954F72"/>
+      </a:folHlink>
+    </a:clrScheme>
+    <a:fontScheme name="Office">
+      <a:majorFont>
+        <a:latin typeface="Calibri Light"/>
+        <a:ea typeface=""/>
+        <a:cs typeface=""/>
+      </a:majorFont>
+      <a:minorFont>
+        <a:latin typeface="Calibri"/>
+        <a:ea typeface=""/>
+        <a:cs typeface=""/>
+      </a:minorFont>
+    </a:fontScheme>
+    <a:fmtScheme name="Office">
+      <a:fillStyleLst>
+        <a:solidFill>
+          <a:schemeClr val="phClr"/>
+        </a:solidFill>
+        <a:solidFill>
+          <a:schemeClr val="phClr"/>
+        </a:solidFill>
+        <a:solidFill>
+          <a:schemeClr val="phClr"/>
+        </a:solidFill>
+      </a:fillStyleLst>
+      <a:lnStyleLst>
+        <a:ln w="6350" cap="flat" cmpd="sng" algn="ctr">
+          <a:solidFill>
+            <a:schemeClr val="phClr"/>
+          </a:solidFill>
+          <a:prstDash val="solid"/>
+          <a:miter lim="800000"/>
+        </a:ln>
+        <a:ln w="12700" cap="flat" cmpd="sng" algn="ctr">
+          <a:solidFill>
+            <a:schemeClr val="phClr"/>
+          </a:solidFill>
+          <a:prstDash val="solid"/>
+          <a:miter lim="800000"/>
+        </a:ln>
+        <a:ln w="19050" cap="flat" cmpd="sng" algn="ctr">
+          <a:solidFill>
+            <a:schemeClr val="phClr"/>
+          </a:solidFill>
+          <a:prstDash val="solid"/>
+          <a:miter lim="800000"/>
+        </a:ln>
+      </a:lnStyleLst>
+      <a:effectStyleLst>
+        <a:effectStyle>
+          <a:effectLst/>
+        </a:effectStyle>
+        <a:effectStyle>
+          <a:effectLst/>
+        </a:effectStyle>
+        <a:effectStyle>
+          <a:effectLst/>
+        </a:effectStyle>
+      </a:effectStyleLst>
+      <a:bgFillStyleLst>
+        <a:solidFill>
+          <a:schemeClr val="phClr"/>
+        </a:solidFill>
+        <a:solidFill>
+          <a:schemeClr val="phClr"/>
+        </a:solidFill>
+        <a:solidFill>
+          <a:schemeClr val="phClr"/>
+        </a:solidFill>
+      </a:bgFillStyleLst>
+    </a:fmtScheme>
+  </a:themeElements>
+  <a:objectDefaults/>
+  <a:extraClrSchemeLst/>
+</a:theme>
 </file>
--- a/test/generator/baseline/gen.csv.to.pptx.pptx
+++ b/test/generator/baseline/gen.csv.to.pptx.pptx
@@ -86,7 +86,11 @@
             </a:pPr>
             <a:r>
               <a:rPr lang="en-US" dirty="0"/>
-              <a:t>Comment: # TestString: Hello from custom props</a:t>
+              <a:t>Comment: </a:t>
+            </a:r>
+            <a:r>
+              <a:rPr lang="en-US" dirty="0"/>
+              <a:t># TestString: Hello from custom props</a:t>
             </a:r>
             <a:endParaRPr lang="en-US" dirty="0"/>
           </a:p>
@@ -96,7 +100,11 @@
             </a:pPr>
             <a:r>
               <a:rPr lang="en-US" dirty="0"/>
-              <a:t>Comment: # TestNumber: 42</a:t>
+              <a:t>Comment: </a:t>
+            </a:r>
+            <a:r>
+              <a:rPr lang="en-US" dirty="0"/>
+              <a:t># TestNumber: 42</a:t>
             </a:r>
             <a:endParaRPr lang="en-US" dirty="0"/>
           </a:p>
@@ -106,7 +114,11 @@
             </a:pPr>
             <a:r>
               <a:rPr lang="en-US" dirty="0"/>
-              <a:t>Comment: # TestBool: true</a:t>
+              <a:t>Comment: </a:t>
+            </a:r>
+            <a:r>
+              <a:rPr lang="en-US" dirty="0"/>
+              <a:t># TestBool: true</a:t>
             </a:r>
             <a:endParaRPr lang="en-US" dirty="0"/>
           </a:p>
@@ -116,7 +128,11 @@
             </a:pPr>
             <a:r>
               <a:rPr lang="en-US" dirty="0"/>
-              <a:t>Comment: # Sheet: Sheet1</a:t>
+              <a:t>Comment: </a:t>
+            </a:r>
+            <a:r>
+              <a:rPr lang="en-US" dirty="0"/>
+              <a:t># Sheet: Sheet1</a:t>
             </a:r>
             <a:endParaRPr lang="en-US" dirty="0"/>
           </a:p>
@@ -126,7 +142,11 @@
             </a:pPr>
             <a:r>
               <a:rPr lang="en-US" dirty="0"/>
-              <a:t>Comment: # Sheet: Sheet2</a:t>
+              <a:t>Comment: </a:t>
+            </a:r>
+            <a:r>
+              <a:rPr lang="en-US" dirty="0"/>
+              <a:t># Sheet: Sheet2</a:t>
             </a:r>
             <a:endParaRPr lang="en-US" dirty="0"/>
           </a:p>
@@ -136,7 +156,11 @@
             </a:pPr>
             <a:r>
               <a:rPr lang="en-US" dirty="0"/>
-              <a:t>Comment: # Sheet: Sheet3</a:t>
+              <a:t>Comment: </a:t>
+            </a:r>
+            <a:r>
+              <a:rPr lang="en-US" dirty="0"/>
+              <a:t># Sheet: Sheet3</a:t>
             </a:r>
             <a:endParaRPr lang="en-US" dirty="0"/>
           </a:p>
@@ -146,7 +170,11 @@
             </a:pPr>
             <a:r>
               <a:rPr lang="en-US" dirty="0"/>
-              <a:t>Comment: # Sheet: Sheet4</a:t>
+              <a:t>Comment: </a:t>
+            </a:r>
+            <a:r>
+              <a:rPr lang="en-US" dirty="0"/>
+              <a:t># Sheet: Sheet4</a:t>
             </a:r>
             <a:endParaRPr lang="en-US" dirty="0"/>
           </a:p>
@@ -156,7 +184,11 @@
             </a:pPr>
             <a:r>
               <a:rPr lang="en-US" dirty="0"/>
-              <a:t>Comment: # Sheet: Sheet5</a:t>
+              <a:t>Comment: </a:t>
+            </a:r>
+            <a:r>
+              <a:rPr lang="en-US" dirty="0"/>
+              <a:t># Sheet: Sheet5</a:t>
             </a:r>
             <a:endParaRPr lang="en-US" dirty="0"/>
           </a:p>
@@ -166,7 +198,11 @@
             </a:pPr>
             <a:r>
               <a:rPr lang="en-US" dirty="0"/>
-              <a:t>Comment: # Sheet: Sheet6</a:t>
+              <a:t>Comment: </a:t>
+            </a:r>
+            <a:r>
+              <a:rPr lang="en-US" dirty="0"/>
+              <a:t># Sheet: Sheet6</a:t>
             </a:r>
             <a:endParaRPr lang="en-US" dirty="0"/>
           </a:p>
@@ -176,7 +212,11 @@
             </a:pPr>
             <a:r>
               <a:rPr lang="en-US" dirty="0"/>
-              <a:t>Comment: # Sheet: Sheet7</a:t>
+              <a:t>Comment: </a:t>
+            </a:r>
+            <a:r>
+              <a:rPr lang="en-US" dirty="0"/>
+              <a:t># Sheet: Sheet7</a:t>
             </a:r>
             <a:endParaRPr lang="en-US" dirty="0"/>
           </a:p>
@@ -186,7 +226,11 @@
             </a:pPr>
             <a:r>
               <a:rPr lang="en-US" dirty="0"/>
-              <a:t>Comment: # Sheet: Sheet8</a:t>
+              <a:t>Comment: </a:t>
+            </a:r>
+            <a:r>
+              <a:rPr lang="en-US" dirty="0"/>
+              <a:t># Sheet: Sheet8</a:t>
             </a:r>
             <a:endParaRPr lang="en-US" dirty="0"/>
           </a:p>
@@ -196,7 +240,11 @@
             </a:pPr>
             <a:r>
               <a:rPr lang="en-US" dirty="0"/>
-              <a:t>Comment: # Sheet: Chart Sheet</a:t>
+              <a:t>Comment: </a:t>
+            </a:r>
+            <a:r>
+              <a:rPr lang="en-US" dirty="0"/>
+              <a:t># Sheet: Chart Sheet</a:t>
             </a:r>
             <a:endParaRPr lang="en-US" dirty="0"/>
           </a:p>
